--- a/doc/공모전/쉼마루_서비스소개서_v7.pptx
+++ b/doc/공모전/쉼마루_서비스소개서_v7.pptx
@@ -4936,7 +4936,7 @@
                             <a:srgbClr val="000000"/>
                           </a:solidFill>
                         </a:rPr>
-                        <a:t>경북 축제의 일정·장소·주최 정보를 보강해 축제 캘린더를 구성하고, 여행 기간과 겹치는 축제만 코스에 연계</a:t>
+                        <a:t>경북 축제의 일정·장소·주최 정보를 받아 축제 캘린더를 구성하고, 여행 기간과 겹치는 축제만 코스에 연계하며, ‘지금 경북’ 에서 이번 주말 시군별 축제 여부를 표시</a:t>
                       </a:r>
                     </a:p>
                   </a:txBody>
@@ -5283,7 +5283,7 @@
                             <a:srgbClr val="000000"/>
                           </a:solidFill>
                         </a:rPr>
-                        <a:t>여행 날짜의 강수확률(POP)을 조회해 비 예보일에는 실내 장소를, 맑은 날에는 실외 장소를 우선 배치 (예보 범위를 벗어나면 평년 강수 경향으로 대체)</a:t>
+                        <a:t>여행 날짜의 강수확률(POP)을 조회해 비 예보일에는 실내 장소를, 맑은 날에는 실외 장소를 우선 배치하고, ‘지금 경북’ 의 주말 날씨를 함께 제공 (예보 범위를 벗어나면 평년 강수 경향으로 대체)</a:t>
                       </a:r>
                     </a:p>
                   </a:txBody>
@@ -5682,7 +5682,7 @@
                             <a:srgbClr val="000000"/>
                           </a:solidFill>
                         </a:rPr>
-                        <a:t>코스의 방문 순서와 이동 동선을 지도에 표시하고, 완성한 코스를 카카오톡으로 공유</a:t>
+                        <a:t>코스의 방문 순서와 이동 동선을 지도에 표시하고(일차별 보기 포함), 완성한 코스를 카카오톡으로 공유</a:t>
                       </a:r>
                     </a:p>
                   </a:txBody>
@@ -5881,7 +5881,7 @@
                             <a:srgbClr val="000000"/>
                           </a:solidFill>
                         </a:rPr>
-                        <a:t>한국불교문화사업단 템플스테이 포털 (templestay.com) 사찰 정보</a:t>
+                        <a:t>한국불교문화사업단 템플스테이 포털 (templestay.com)</a:t>
                       </a:r>
                     </a:p>
                   </a:txBody>
@@ -6081,7 +6081,7 @@
                             <a:srgbClr val="000000"/>
                           </a:solidFill>
                         </a:rPr>
-                        <a:t>경북 템플스테이 운영 사찰 목록을 연계해 전통 숙박 카테고리를 보강</a:t>
+                        <a:t>경북 템플스테이 운영 사찰 목록을 연계해 전통 숙박 카테고리와 템플스테이 테마 코스를 보강 (OpenAPI 미제공 화면이라 서버 프록시로 목록만 파싱)</a:t>
                       </a:r>
                     </a:p>
                   </a:txBody>
